--- a/msc_thesis_expose.pptx
+++ b/msc_thesis_expose.pptx
@@ -111,6 +111,11 @@
       </a:defRPr>
     </a:lvl9pPr>
   </p:defaultTextStyle>
+  <p:extLst>
+    <p:ext uri="{EFAFB233-063F-42B5-8137-9DF3F51BA10A}">
+      <p15:sldGuideLst xmlns:p15="http://schemas.microsoft.com/office/powerpoint/2012/main"/>
+    </p:ext>
+  </p:extLst>
 </p:presentation>
 </file>
 
@@ -196,7 +201,7 @@
           <a:p>
             <a:fld id="{22B21875-741A-214E-B5BD-9E5E7B116BF2}" type="datetimeFigureOut">
               <a:rPr lang="en-US" smtClean="0"/>
-              <a:t>2/9/26</a:t>
+              <a:t>3/22/26</a:t>
             </a:fld>
             <a:endParaRPr lang="en-US"/>
           </a:p>
@@ -946,7 +951,7 @@
           <a:p>
             <a:fld id="{5D24FF9D-C949-704A-8396-D2529650C987}" type="datetimeFigureOut">
               <a:rPr lang="en-US" smtClean="0"/>
-              <a:t>2/9/26</a:t>
+              <a:t>3/22/26</a:t>
             </a:fld>
             <a:endParaRPr lang="en-US"/>
           </a:p>
@@ -1144,7 +1149,7 @@
           <a:p>
             <a:fld id="{5D24FF9D-C949-704A-8396-D2529650C987}" type="datetimeFigureOut">
               <a:rPr lang="en-US" smtClean="0"/>
-              <a:t>2/9/26</a:t>
+              <a:t>3/22/26</a:t>
             </a:fld>
             <a:endParaRPr lang="en-US"/>
           </a:p>
@@ -1352,7 +1357,7 @@
           <a:p>
             <a:fld id="{5D24FF9D-C949-704A-8396-D2529650C987}" type="datetimeFigureOut">
               <a:rPr lang="en-US" smtClean="0"/>
-              <a:t>2/9/26</a:t>
+              <a:t>3/22/26</a:t>
             </a:fld>
             <a:endParaRPr lang="en-US"/>
           </a:p>
@@ -1585,7 +1590,7 @@
           <a:p>
             <a:fld id="{5D24FF9D-C949-704A-8396-D2529650C987}" type="datetimeFigureOut">
               <a:rPr lang="en-US" smtClean="0"/>
-              <a:t>2/9/26</a:t>
+              <a:t>3/22/26</a:t>
             </a:fld>
             <a:endParaRPr lang="en-US"/>
           </a:p>
@@ -1860,7 +1865,7 @@
           <a:p>
             <a:fld id="{5D24FF9D-C949-704A-8396-D2529650C987}" type="datetimeFigureOut">
               <a:rPr lang="en-US" smtClean="0"/>
-              <a:t>2/9/26</a:t>
+              <a:t>3/22/26</a:t>
             </a:fld>
             <a:endParaRPr lang="en-US"/>
           </a:p>
@@ -2125,7 +2130,7 @@
           <a:p>
             <a:fld id="{5D24FF9D-C949-704A-8396-D2529650C987}" type="datetimeFigureOut">
               <a:rPr lang="en-US" smtClean="0"/>
-              <a:t>2/9/26</a:t>
+              <a:t>3/22/26</a:t>
             </a:fld>
             <a:endParaRPr lang="en-US"/>
           </a:p>
@@ -2537,7 +2542,7 @@
           <a:p>
             <a:fld id="{5D24FF9D-C949-704A-8396-D2529650C987}" type="datetimeFigureOut">
               <a:rPr lang="en-US" smtClean="0"/>
-              <a:t>2/9/26</a:t>
+              <a:t>3/22/26</a:t>
             </a:fld>
             <a:endParaRPr lang="en-US"/>
           </a:p>
@@ -2678,7 +2683,7 @@
           <a:p>
             <a:fld id="{5D24FF9D-C949-704A-8396-D2529650C987}" type="datetimeFigureOut">
               <a:rPr lang="en-US" smtClean="0"/>
-              <a:t>2/9/26</a:t>
+              <a:t>3/22/26</a:t>
             </a:fld>
             <a:endParaRPr lang="en-US"/>
           </a:p>
@@ -2791,7 +2796,7 @@
           <a:p>
             <a:fld id="{5D24FF9D-C949-704A-8396-D2529650C987}" type="datetimeFigureOut">
               <a:rPr lang="en-US" smtClean="0"/>
-              <a:t>2/9/26</a:t>
+              <a:t>3/22/26</a:t>
             </a:fld>
             <a:endParaRPr lang="en-US"/>
           </a:p>
@@ -3102,7 +3107,7 @@
           <a:p>
             <a:fld id="{5D24FF9D-C949-704A-8396-D2529650C987}" type="datetimeFigureOut">
               <a:rPr lang="en-US" smtClean="0"/>
-              <a:t>2/9/26</a:t>
+              <a:t>3/22/26</a:t>
             </a:fld>
             <a:endParaRPr lang="en-US"/>
           </a:p>
@@ -3390,7 +3395,7 @@
           <a:p>
             <a:fld id="{5D24FF9D-C949-704A-8396-D2529650C987}" type="datetimeFigureOut">
               <a:rPr lang="en-US" smtClean="0"/>
-              <a:t>2/9/26</a:t>
+              <a:t>3/22/26</a:t>
             </a:fld>
             <a:endParaRPr lang="en-US"/>
           </a:p>
@@ -3631,7 +3636,7 @@
           <a:p>
             <a:fld id="{5D24FF9D-C949-704A-8396-D2529650C987}" type="datetimeFigureOut">
               <a:rPr lang="en-US" smtClean="0"/>
-              <a:t>2/9/26</a:t>
+              <a:t>3/22/26</a:t>
             </a:fld>
             <a:endParaRPr lang="en-US"/>
           </a:p>
@@ -9088,7 +9093,7 @@
                   <a:ea typeface="Calibri" pitchFamily="34" charset="-122"/>
                   <a:cs typeface="Calibri" pitchFamily="34" charset="-120"/>
                 </a:rPr>
-                <a:t>Extension 1: Oil-Adjusted Exchange Rate</a:t>
+                <a:t>Extension 1: Futures adjusted equity</a:t>
               </a:r>
               <a:endParaRPr lang="en-US" sz="1733" dirty="0"/>
             </a:p>
@@ -9183,15 +9188,8 @@
                   <a:latin typeface="Calibri" pitchFamily="34" charset="0"/>
                   <a:cs typeface="Calibri" pitchFamily="34" charset="-120"/>
                 </a:rPr>
-                <a:t>The baseline CCA converts local currency liabilities into USD at the spot rate. We let the exporter currencies become more or less valuable with the price of oil, which makes the equity claim reflect oil price dynamics</a:t>
+                <a:t>The baseline CCA treats LCL as the equity value of the sovereign, but this equity is not as informational as a stock price. We introduce the degree of contango/backwardation as a measure of how high the demand for oil is and what is the capability of the sovereign of producing hard currency. </a:t>
               </a:r>
-            </a:p>
-            <a:p>
-              <a:pPr>
-                <a:lnSpc>
-                  <a:spcPct val="110000"/>
-                </a:lnSpc>
-              </a:pPr>
               <a:endParaRPr lang="en-US" sz="1333" dirty="0"/>
             </a:p>
             <a:p>
